--- a/docs/pptx/whole/ritu-linsubhr-ratio-hosp4_10pct.pptx
+++ b/docs/pptx/whole/ritu-linsubhr-ratio-hosp4_10pct.pptx
@@ -2443,7 +2443,7 @@
           </p:nvSpPr>
           <p:spPr>
             <a:xfrm>
-              <a:off x="955490" y="2073503"/>
+              <a:off x="957589" y="2073503"/>
               <a:ext cx="0" cy="3649639"/>
             </a:xfrm>
             <a:custGeom>
@@ -2486,7 +2486,7 @@
           </p:nvSpPr>
           <p:spPr>
             <a:xfrm>
-              <a:off x="1892768" y="2073503"/>
+              <a:off x="1893867" y="2073503"/>
               <a:ext cx="0" cy="3649639"/>
             </a:xfrm>
             <a:custGeom>
@@ -2529,7 +2529,7 @@
           </p:nvSpPr>
           <p:spPr>
             <a:xfrm>
-              <a:off x="2830046" y="2073503"/>
+              <a:off x="2830144" y="2073503"/>
               <a:ext cx="0" cy="3649639"/>
             </a:xfrm>
             <a:custGeom>
@@ -2572,7 +2572,7 @@
           </p:nvSpPr>
           <p:spPr>
             <a:xfrm>
-              <a:off x="3767323" y="2073503"/>
+              <a:off x="3766422" y="2073503"/>
               <a:ext cx="0" cy="3649639"/>
             </a:xfrm>
             <a:custGeom>
@@ -2615,7 +2615,7 @@
           </p:nvSpPr>
           <p:spPr>
             <a:xfrm>
-              <a:off x="4704601" y="2073503"/>
+              <a:off x="4702700" y="2073503"/>
               <a:ext cx="0" cy="3649639"/>
             </a:xfrm>
             <a:custGeom>
@@ -2658,7 +2658,7 @@
           </p:nvSpPr>
           <p:spPr>
             <a:xfrm>
-              <a:off x="5641878" y="2073503"/>
+              <a:off x="5638978" y="2073503"/>
               <a:ext cx="0" cy="3649639"/>
             </a:xfrm>
             <a:custGeom>
@@ -2701,7 +2701,7 @@
           </p:nvSpPr>
           <p:spPr>
             <a:xfrm>
-              <a:off x="6579156" y="2073503"/>
+              <a:off x="6575256" y="2073503"/>
               <a:ext cx="0" cy="3649639"/>
             </a:xfrm>
             <a:custGeom>
@@ -2744,7 +2744,7 @@
           </p:nvSpPr>
           <p:spPr>
             <a:xfrm>
-              <a:off x="7516433" y="2073503"/>
+              <a:off x="7511534" y="2073503"/>
               <a:ext cx="0" cy="3649639"/>
             </a:xfrm>
             <a:custGeom>
@@ -2787,7 +2787,7 @@
           </p:nvSpPr>
           <p:spPr>
             <a:xfrm>
-              <a:off x="8453711" y="2073503"/>
+              <a:off x="8447812" y="2073503"/>
               <a:ext cx="0" cy="3649639"/>
             </a:xfrm>
             <a:custGeom>
@@ -3045,7 +3045,7 @@
           </p:nvSpPr>
           <p:spPr>
             <a:xfrm>
-              <a:off x="1424129" y="2073503"/>
+              <a:off x="1425728" y="2073503"/>
               <a:ext cx="0" cy="3649639"/>
             </a:xfrm>
             <a:custGeom>
@@ -3088,7 +3088,7 @@
           </p:nvSpPr>
           <p:spPr>
             <a:xfrm>
-              <a:off x="2361407" y="2073503"/>
+              <a:off x="2362006" y="2073503"/>
               <a:ext cx="0" cy="3649639"/>
             </a:xfrm>
             <a:custGeom>
@@ -3131,7 +3131,7 @@
           </p:nvSpPr>
           <p:spPr>
             <a:xfrm>
-              <a:off x="3298684" y="2073503"/>
+              <a:off x="3298283" y="2073503"/>
               <a:ext cx="0" cy="3649639"/>
             </a:xfrm>
             <a:custGeom>
@@ -3174,7 +3174,7 @@
           </p:nvSpPr>
           <p:spPr>
             <a:xfrm>
-              <a:off x="4235962" y="2073503"/>
+              <a:off x="4234561" y="2073503"/>
               <a:ext cx="0" cy="3649639"/>
             </a:xfrm>
             <a:custGeom>
@@ -3217,7 +3217,7 @@
           </p:nvSpPr>
           <p:spPr>
             <a:xfrm>
-              <a:off x="5173239" y="2073503"/>
+              <a:off x="5170839" y="2073503"/>
               <a:ext cx="0" cy="3649639"/>
             </a:xfrm>
             <a:custGeom>
@@ -3260,7 +3260,7 @@
           </p:nvSpPr>
           <p:spPr>
             <a:xfrm>
-              <a:off x="6110517" y="2073503"/>
+              <a:off x="6107117" y="2073503"/>
               <a:ext cx="0" cy="3649639"/>
             </a:xfrm>
             <a:custGeom>
@@ -3303,7 +3303,7 @@
           </p:nvSpPr>
           <p:spPr>
             <a:xfrm>
-              <a:off x="7047795" y="2073503"/>
+              <a:off x="7043395" y="2073503"/>
               <a:ext cx="0" cy="3649639"/>
             </a:xfrm>
             <a:custGeom>
@@ -3346,7 +3346,7 @@
           </p:nvSpPr>
           <p:spPr>
             <a:xfrm>
-              <a:off x="7985072" y="2073503"/>
+              <a:off x="7979673" y="2073503"/>
               <a:ext cx="0" cy="3649639"/>
             </a:xfrm>
             <a:custGeom>
@@ -3389,354 +3389,354 @@
           </p:nvSpPr>
           <p:spPr>
             <a:xfrm>
-              <a:off x="4207291" y="2073503"/>
-              <a:ext cx="4055387" cy="3483746"/>
+              <a:off x="4203101" y="2073503"/>
+              <a:ext cx="4059577" cy="3483746"/>
             </a:xfrm>
             <a:custGeom>
               <a:avLst/>
               <a:pathLst>
-                <a:path w="4055387" h="3483746">
+                <a:path w="4059577" h="3483746">
                   <a:moveTo>
-                    <a:pt x="29017" y="0"/>
+                    <a:pt x="34764" y="0"/>
                   </a:moveTo>
                   <a:lnTo>
-                    <a:pt x="44526" y="1158189"/>
-                  </a:lnTo>
-                  <a:lnTo>
-                    <a:pt x="116148" y="2750926"/>
-                  </a:lnTo>
-                  <a:lnTo>
-                    <a:pt x="187771" y="3187982"/>
-                  </a:lnTo>
-                  <a:lnTo>
-                    <a:pt x="259393" y="3364376"/>
-                  </a:lnTo>
-                  <a:lnTo>
-                    <a:pt x="331016" y="3435569"/>
-                  </a:lnTo>
-                  <a:lnTo>
-                    <a:pt x="402638" y="3464302"/>
-                  </a:lnTo>
-                  <a:lnTo>
-                    <a:pt x="474261" y="3475899"/>
-                  </a:lnTo>
-                  <a:lnTo>
-                    <a:pt x="545883" y="3480579"/>
-                  </a:lnTo>
-                  <a:lnTo>
-                    <a:pt x="617506" y="3482468"/>
-                  </a:lnTo>
-                  <a:lnTo>
-                    <a:pt x="689128" y="3483230"/>
-                  </a:lnTo>
-                  <a:lnTo>
-                    <a:pt x="760751" y="3483538"/>
-                  </a:lnTo>
-                  <a:lnTo>
-                    <a:pt x="832373" y="3483662"/>
-                  </a:lnTo>
-                  <a:lnTo>
-                    <a:pt x="903996" y="3483712"/>
-                  </a:lnTo>
-                  <a:lnTo>
-                    <a:pt x="975618" y="3483733"/>
-                  </a:lnTo>
-                  <a:lnTo>
-                    <a:pt x="1047241" y="3483741"/>
-                  </a:lnTo>
-                  <a:lnTo>
-                    <a:pt x="1118863" y="3483744"/>
-                  </a:lnTo>
-                  <a:lnTo>
-                    <a:pt x="1190486" y="3483746"/>
-                  </a:lnTo>
-                  <a:lnTo>
-                    <a:pt x="1262109" y="3483746"/>
-                  </a:lnTo>
-                  <a:lnTo>
-                    <a:pt x="1333731" y="3483746"/>
-                  </a:lnTo>
-                  <a:lnTo>
-                    <a:pt x="1405354" y="3483746"/>
-                  </a:lnTo>
-                  <a:lnTo>
-                    <a:pt x="1476976" y="3483746"/>
-                  </a:lnTo>
-                  <a:lnTo>
-                    <a:pt x="1548599" y="3483746"/>
-                  </a:lnTo>
-                  <a:lnTo>
-                    <a:pt x="1620221" y="3483746"/>
-                  </a:lnTo>
-                  <a:lnTo>
-                    <a:pt x="1691844" y="3483746"/>
-                  </a:lnTo>
-                  <a:lnTo>
-                    <a:pt x="1763466" y="3483746"/>
-                  </a:lnTo>
-                  <a:lnTo>
-                    <a:pt x="1835089" y="3483746"/>
-                  </a:lnTo>
-                  <a:lnTo>
-                    <a:pt x="1906711" y="3483746"/>
-                  </a:lnTo>
-                  <a:lnTo>
-                    <a:pt x="1978334" y="3483746"/>
-                  </a:lnTo>
-                  <a:lnTo>
-                    <a:pt x="2049956" y="3483746"/>
-                  </a:lnTo>
-                  <a:lnTo>
-                    <a:pt x="2121579" y="3483746"/>
-                  </a:lnTo>
-                  <a:lnTo>
-                    <a:pt x="2193201" y="3483746"/>
-                  </a:lnTo>
-                  <a:lnTo>
-                    <a:pt x="2264824" y="3483746"/>
-                  </a:lnTo>
-                  <a:lnTo>
-                    <a:pt x="2336446" y="3483746"/>
-                  </a:lnTo>
-                  <a:lnTo>
-                    <a:pt x="2408069" y="3483746"/>
-                  </a:lnTo>
-                  <a:lnTo>
-                    <a:pt x="2479691" y="3483746"/>
-                  </a:lnTo>
-                  <a:lnTo>
-                    <a:pt x="2551314" y="3483746"/>
-                  </a:lnTo>
-                  <a:lnTo>
-                    <a:pt x="2622937" y="3483746"/>
-                  </a:lnTo>
-                  <a:lnTo>
-                    <a:pt x="2694559" y="3483746"/>
-                  </a:lnTo>
-                  <a:lnTo>
-                    <a:pt x="2766182" y="3483746"/>
-                  </a:lnTo>
-                  <a:lnTo>
-                    <a:pt x="2837804" y="3483746"/>
-                  </a:lnTo>
-                  <a:lnTo>
-                    <a:pt x="2909427" y="3483746"/>
-                  </a:lnTo>
-                  <a:lnTo>
-                    <a:pt x="2981049" y="3483746"/>
-                  </a:lnTo>
-                  <a:lnTo>
-                    <a:pt x="3052672" y="3483746"/>
-                  </a:lnTo>
-                  <a:lnTo>
-                    <a:pt x="3124294" y="3483746"/>
-                  </a:lnTo>
-                  <a:lnTo>
-                    <a:pt x="3195917" y="3483746"/>
-                  </a:lnTo>
-                  <a:lnTo>
-                    <a:pt x="3267539" y="3483746"/>
-                  </a:lnTo>
-                  <a:lnTo>
-                    <a:pt x="3339162" y="3483746"/>
-                  </a:lnTo>
-                  <a:lnTo>
-                    <a:pt x="3410784" y="3483746"/>
-                  </a:lnTo>
-                  <a:lnTo>
-                    <a:pt x="3482407" y="3483746"/>
-                  </a:lnTo>
-                  <a:lnTo>
-                    <a:pt x="3554029" y="3483746"/>
-                  </a:lnTo>
-                  <a:lnTo>
-                    <a:pt x="3625652" y="3483746"/>
-                  </a:lnTo>
-                  <a:lnTo>
-                    <a:pt x="3697274" y="3483746"/>
-                  </a:lnTo>
-                  <a:lnTo>
-                    <a:pt x="3768897" y="3483746"/>
-                  </a:lnTo>
-                  <a:lnTo>
-                    <a:pt x="3840519" y="3483746"/>
-                  </a:lnTo>
-                  <a:lnTo>
-                    <a:pt x="3912142" y="3483746"/>
-                  </a:lnTo>
-                  <a:lnTo>
-                    <a:pt x="3983765" y="3483746"/>
-                  </a:lnTo>
-                  <a:lnTo>
-                    <a:pt x="4055387" y="3483746"/>
-                  </a:lnTo>
-                  <a:lnTo>
-                    <a:pt x="3983765" y="3483746"/>
-                  </a:lnTo>
-                  <a:lnTo>
-                    <a:pt x="3912142" y="3483746"/>
-                  </a:lnTo>
-                  <a:lnTo>
-                    <a:pt x="3840519" y="3483746"/>
-                  </a:lnTo>
-                  <a:lnTo>
-                    <a:pt x="3768897" y="3483746"/>
-                  </a:lnTo>
-                  <a:lnTo>
-                    <a:pt x="3697274" y="3483746"/>
-                  </a:lnTo>
-                  <a:lnTo>
-                    <a:pt x="3625652" y="3483746"/>
-                  </a:lnTo>
-                  <a:lnTo>
-                    <a:pt x="3554029" y="3483746"/>
-                  </a:lnTo>
-                  <a:lnTo>
-                    <a:pt x="3482407" y="3483746"/>
-                  </a:lnTo>
-                  <a:lnTo>
-                    <a:pt x="3410784" y="3483746"/>
-                  </a:lnTo>
-                  <a:lnTo>
-                    <a:pt x="3339162" y="3483746"/>
-                  </a:lnTo>
-                  <a:lnTo>
-                    <a:pt x="3267539" y="3483746"/>
-                  </a:lnTo>
-                  <a:lnTo>
-                    <a:pt x="3195917" y="3483746"/>
-                  </a:lnTo>
-                  <a:lnTo>
-                    <a:pt x="3124294" y="3483746"/>
-                  </a:lnTo>
-                  <a:lnTo>
-                    <a:pt x="3052672" y="3483746"/>
-                  </a:lnTo>
-                  <a:lnTo>
-                    <a:pt x="2981049" y="3483746"/>
-                  </a:lnTo>
-                  <a:lnTo>
-                    <a:pt x="2909427" y="3483746"/>
-                  </a:lnTo>
-                  <a:lnTo>
-                    <a:pt x="2837804" y="3483746"/>
-                  </a:lnTo>
-                  <a:lnTo>
-                    <a:pt x="2766182" y="3483746"/>
-                  </a:lnTo>
-                  <a:lnTo>
-                    <a:pt x="2694559" y="3483746"/>
-                  </a:lnTo>
-                  <a:lnTo>
-                    <a:pt x="2622937" y="3483746"/>
-                  </a:lnTo>
-                  <a:lnTo>
-                    <a:pt x="2551314" y="3483746"/>
-                  </a:lnTo>
-                  <a:lnTo>
-                    <a:pt x="2479691" y="3483746"/>
-                  </a:lnTo>
-                  <a:lnTo>
-                    <a:pt x="2408069" y="3483746"/>
-                  </a:lnTo>
-                  <a:lnTo>
-                    <a:pt x="2336446" y="3483746"/>
-                  </a:lnTo>
-                  <a:lnTo>
-                    <a:pt x="2264824" y="3483746"/>
-                  </a:lnTo>
-                  <a:lnTo>
-                    <a:pt x="2193201" y="3483746"/>
-                  </a:lnTo>
-                  <a:lnTo>
-                    <a:pt x="2121579" y="3483746"/>
-                  </a:lnTo>
-                  <a:lnTo>
-                    <a:pt x="2049956" y="3483746"/>
-                  </a:lnTo>
-                  <a:lnTo>
-                    <a:pt x="1978334" y="3483746"/>
-                  </a:lnTo>
-                  <a:lnTo>
-                    <a:pt x="1906711" y="3483746"/>
-                  </a:lnTo>
-                  <a:lnTo>
-                    <a:pt x="1835089" y="3483746"/>
-                  </a:lnTo>
-                  <a:lnTo>
-                    <a:pt x="1763466" y="3483746"/>
-                  </a:lnTo>
-                  <a:lnTo>
-                    <a:pt x="1691844" y="3483746"/>
-                  </a:lnTo>
-                  <a:lnTo>
-                    <a:pt x="1620221" y="3483746"/>
-                  </a:lnTo>
-                  <a:lnTo>
-                    <a:pt x="1548599" y="3483746"/>
-                  </a:lnTo>
-                  <a:lnTo>
-                    <a:pt x="1476976" y="3483746"/>
-                  </a:lnTo>
-                  <a:lnTo>
-                    <a:pt x="1405354" y="3483746"/>
-                  </a:lnTo>
-                  <a:lnTo>
-                    <a:pt x="1333731" y="3483746"/>
-                  </a:lnTo>
-                  <a:lnTo>
-                    <a:pt x="1262109" y="3483746"/>
-                  </a:lnTo>
-                  <a:lnTo>
-                    <a:pt x="1190486" y="3483746"/>
-                  </a:lnTo>
-                  <a:lnTo>
-                    <a:pt x="1118863" y="3483746"/>
-                  </a:lnTo>
-                  <a:lnTo>
-                    <a:pt x="1047241" y="3483746"/>
-                  </a:lnTo>
-                  <a:lnTo>
-                    <a:pt x="975618" y="3483746"/>
-                  </a:lnTo>
-                  <a:lnTo>
-                    <a:pt x="903996" y="3483745"/>
-                  </a:lnTo>
-                  <a:lnTo>
-                    <a:pt x="832373" y="3483742"/>
-                  </a:lnTo>
-                  <a:lnTo>
-                    <a:pt x="760751" y="3483731"/>
-                  </a:lnTo>
-                  <a:lnTo>
-                    <a:pt x="689128" y="3483696"/>
-                  </a:lnTo>
-                  <a:lnTo>
-                    <a:pt x="617506" y="3483581"/>
-                  </a:lnTo>
-                  <a:lnTo>
-                    <a:pt x="545883" y="3483201"/>
-                  </a:lnTo>
-                  <a:lnTo>
-                    <a:pt x="474261" y="3481946"/>
-                  </a:lnTo>
-                  <a:lnTo>
-                    <a:pt x="402638" y="3477805"/>
-                  </a:lnTo>
-                  <a:lnTo>
-                    <a:pt x="331016" y="3464138"/>
-                  </a:lnTo>
-                  <a:lnTo>
-                    <a:pt x="259393" y="3419039"/>
-                  </a:lnTo>
-                  <a:lnTo>
-                    <a:pt x="187771" y="3270206"/>
-                  </a:lnTo>
-                  <a:lnTo>
-                    <a:pt x="116148" y="2779048"/>
-                  </a:lnTo>
-                  <a:lnTo>
-                    <a:pt x="44526" y="1668028"/>
+                    <a:pt x="48716" y="1102115"/>
+                  </a:lnTo>
+                  <a:lnTo>
+                    <a:pt x="120338" y="2745859"/>
+                  </a:lnTo>
+                  <a:lnTo>
+                    <a:pt x="191961" y="3177567"/>
+                  </a:lnTo>
+                  <a:lnTo>
+                    <a:pt x="263583" y="3356700"/>
+                  </a:lnTo>
+                  <a:lnTo>
+                    <a:pt x="335206" y="3431029"/>
+                  </a:lnTo>
+                  <a:lnTo>
+                    <a:pt x="406828" y="3461872"/>
+                  </a:lnTo>
+                  <a:lnTo>
+                    <a:pt x="478451" y="3474670"/>
+                  </a:lnTo>
+                  <a:lnTo>
+                    <a:pt x="550073" y="3479980"/>
+                  </a:lnTo>
+                  <a:lnTo>
+                    <a:pt x="621696" y="3482184"/>
+                  </a:lnTo>
+                  <a:lnTo>
+                    <a:pt x="693318" y="3483098"/>
+                  </a:lnTo>
+                  <a:lnTo>
+                    <a:pt x="764941" y="3483477"/>
+                  </a:lnTo>
+                  <a:lnTo>
+                    <a:pt x="836564" y="3483635"/>
+                  </a:lnTo>
+                  <a:lnTo>
+                    <a:pt x="908186" y="3483700"/>
+                  </a:lnTo>
+                  <a:lnTo>
+                    <a:pt x="979809" y="3483727"/>
+                  </a:lnTo>
+                  <a:lnTo>
+                    <a:pt x="1051431" y="3483738"/>
+                  </a:lnTo>
+                  <a:lnTo>
+                    <a:pt x="1123054" y="3483743"/>
+                  </a:lnTo>
+                  <a:lnTo>
+                    <a:pt x="1194676" y="3483745"/>
+                  </a:lnTo>
+                  <a:lnTo>
+                    <a:pt x="1266299" y="3483746"/>
+                  </a:lnTo>
+                  <a:lnTo>
+                    <a:pt x="1337921" y="3483746"/>
+                  </a:lnTo>
+                  <a:lnTo>
+                    <a:pt x="1409544" y="3483746"/>
+                  </a:lnTo>
+                  <a:lnTo>
+                    <a:pt x="1481166" y="3483746"/>
+                  </a:lnTo>
+                  <a:lnTo>
+                    <a:pt x="1552789" y="3483746"/>
+                  </a:lnTo>
+                  <a:lnTo>
+                    <a:pt x="1624411" y="3483746"/>
+                  </a:lnTo>
+                  <a:lnTo>
+                    <a:pt x="1696034" y="3483746"/>
+                  </a:lnTo>
+                  <a:lnTo>
+                    <a:pt x="1767656" y="3483746"/>
+                  </a:lnTo>
+                  <a:lnTo>
+                    <a:pt x="1839279" y="3483746"/>
+                  </a:lnTo>
+                  <a:lnTo>
+                    <a:pt x="1910901" y="3483746"/>
+                  </a:lnTo>
+                  <a:lnTo>
+                    <a:pt x="1982524" y="3483746"/>
+                  </a:lnTo>
+                  <a:lnTo>
+                    <a:pt x="2054146" y="3483746"/>
+                  </a:lnTo>
+                  <a:lnTo>
+                    <a:pt x="2125769" y="3483746"/>
+                  </a:lnTo>
+                  <a:lnTo>
+                    <a:pt x="2197392" y="3483746"/>
+                  </a:lnTo>
+                  <a:lnTo>
+                    <a:pt x="2269014" y="3483746"/>
+                  </a:lnTo>
+                  <a:lnTo>
+                    <a:pt x="2340637" y="3483746"/>
+                  </a:lnTo>
+                  <a:lnTo>
+                    <a:pt x="2412259" y="3483746"/>
+                  </a:lnTo>
+                  <a:lnTo>
+                    <a:pt x="2483882" y="3483746"/>
+                  </a:lnTo>
+                  <a:lnTo>
+                    <a:pt x="2555504" y="3483746"/>
+                  </a:lnTo>
+                  <a:lnTo>
+                    <a:pt x="2627127" y="3483746"/>
+                  </a:lnTo>
+                  <a:lnTo>
+                    <a:pt x="2698749" y="3483746"/>
+                  </a:lnTo>
+                  <a:lnTo>
+                    <a:pt x="2770372" y="3483746"/>
+                  </a:lnTo>
+                  <a:lnTo>
+                    <a:pt x="2841994" y="3483746"/>
+                  </a:lnTo>
+                  <a:lnTo>
+                    <a:pt x="2913617" y="3483746"/>
+                  </a:lnTo>
+                  <a:lnTo>
+                    <a:pt x="2985239" y="3483746"/>
+                  </a:lnTo>
+                  <a:lnTo>
+                    <a:pt x="3056862" y="3483746"/>
+                  </a:lnTo>
+                  <a:lnTo>
+                    <a:pt x="3128484" y="3483746"/>
+                  </a:lnTo>
+                  <a:lnTo>
+                    <a:pt x="3200107" y="3483746"/>
+                  </a:lnTo>
+                  <a:lnTo>
+                    <a:pt x="3271729" y="3483746"/>
+                  </a:lnTo>
+                  <a:lnTo>
+                    <a:pt x="3343352" y="3483746"/>
+                  </a:lnTo>
+                  <a:lnTo>
+                    <a:pt x="3414974" y="3483746"/>
+                  </a:lnTo>
+                  <a:lnTo>
+                    <a:pt x="3486597" y="3483746"/>
+                  </a:lnTo>
+                  <a:lnTo>
+                    <a:pt x="3558220" y="3483746"/>
+                  </a:lnTo>
+                  <a:lnTo>
+                    <a:pt x="3629842" y="3483746"/>
+                  </a:lnTo>
+                  <a:lnTo>
+                    <a:pt x="3701465" y="3483746"/>
+                  </a:lnTo>
+                  <a:lnTo>
+                    <a:pt x="3773087" y="3483746"/>
+                  </a:lnTo>
+                  <a:lnTo>
+                    <a:pt x="3844710" y="3483746"/>
+                  </a:lnTo>
+                  <a:lnTo>
+                    <a:pt x="3916332" y="3483746"/>
+                  </a:lnTo>
+                  <a:lnTo>
+                    <a:pt x="3987955" y="3483746"/>
+                  </a:lnTo>
+                  <a:lnTo>
+                    <a:pt x="4059577" y="3483746"/>
+                  </a:lnTo>
+                  <a:lnTo>
+                    <a:pt x="3987955" y="3483746"/>
+                  </a:lnTo>
+                  <a:lnTo>
+                    <a:pt x="3916332" y="3483746"/>
+                  </a:lnTo>
+                  <a:lnTo>
+                    <a:pt x="3844710" y="3483746"/>
+                  </a:lnTo>
+                  <a:lnTo>
+                    <a:pt x="3773087" y="3483746"/>
+                  </a:lnTo>
+                  <a:lnTo>
+                    <a:pt x="3701465" y="3483746"/>
+                  </a:lnTo>
+                  <a:lnTo>
+                    <a:pt x="3629842" y="3483746"/>
+                  </a:lnTo>
+                  <a:lnTo>
+                    <a:pt x="3558220" y="3483746"/>
+                  </a:lnTo>
+                  <a:lnTo>
+                    <a:pt x="3486597" y="3483746"/>
+                  </a:lnTo>
+                  <a:lnTo>
+                    <a:pt x="3414974" y="3483746"/>
+                  </a:lnTo>
+                  <a:lnTo>
+                    <a:pt x="3343352" y="3483746"/>
+                  </a:lnTo>
+                  <a:lnTo>
+                    <a:pt x="3271729" y="3483746"/>
+                  </a:lnTo>
+                  <a:lnTo>
+                    <a:pt x="3200107" y="3483746"/>
+                  </a:lnTo>
+                  <a:lnTo>
+                    <a:pt x="3128484" y="3483746"/>
+                  </a:lnTo>
+                  <a:lnTo>
+                    <a:pt x="3056862" y="3483746"/>
+                  </a:lnTo>
+                  <a:lnTo>
+                    <a:pt x="2985239" y="3483746"/>
+                  </a:lnTo>
+                  <a:lnTo>
+                    <a:pt x="2913617" y="3483746"/>
+                  </a:lnTo>
+                  <a:lnTo>
+                    <a:pt x="2841994" y="3483746"/>
+                  </a:lnTo>
+                  <a:lnTo>
+                    <a:pt x="2770372" y="3483746"/>
+                  </a:lnTo>
+                  <a:lnTo>
+                    <a:pt x="2698749" y="3483746"/>
+                  </a:lnTo>
+                  <a:lnTo>
+                    <a:pt x="2627127" y="3483746"/>
+                  </a:lnTo>
+                  <a:lnTo>
+                    <a:pt x="2555504" y="3483746"/>
+                  </a:lnTo>
+                  <a:lnTo>
+                    <a:pt x="2483882" y="3483746"/>
+                  </a:lnTo>
+                  <a:lnTo>
+                    <a:pt x="2412259" y="3483746"/>
+                  </a:lnTo>
+                  <a:lnTo>
+                    <a:pt x="2340637" y="3483746"/>
+                  </a:lnTo>
+                  <a:lnTo>
+                    <a:pt x="2269014" y="3483746"/>
+                  </a:lnTo>
+                  <a:lnTo>
+                    <a:pt x="2197392" y="3483746"/>
+                  </a:lnTo>
+                  <a:lnTo>
+                    <a:pt x="2125769" y="3483746"/>
+                  </a:lnTo>
+                  <a:lnTo>
+                    <a:pt x="2054146" y="3483746"/>
+                  </a:lnTo>
+                  <a:lnTo>
+                    <a:pt x="1982524" y="3483746"/>
+                  </a:lnTo>
+                  <a:lnTo>
+                    <a:pt x="1910901" y="3483746"/>
+                  </a:lnTo>
+                  <a:lnTo>
+                    <a:pt x="1839279" y="3483746"/>
+                  </a:lnTo>
+                  <a:lnTo>
+                    <a:pt x="1767656" y="3483746"/>
+                  </a:lnTo>
+                  <a:lnTo>
+                    <a:pt x="1696034" y="3483746"/>
+                  </a:lnTo>
+                  <a:lnTo>
+                    <a:pt x="1624411" y="3483746"/>
+                  </a:lnTo>
+                  <a:lnTo>
+                    <a:pt x="1552789" y="3483746"/>
+                  </a:lnTo>
+                  <a:lnTo>
+                    <a:pt x="1481166" y="3483746"/>
+                  </a:lnTo>
+                  <a:lnTo>
+                    <a:pt x="1409544" y="3483746"/>
+                  </a:lnTo>
+                  <a:lnTo>
+                    <a:pt x="1337921" y="3483746"/>
+                  </a:lnTo>
+                  <a:lnTo>
+                    <a:pt x="1266299" y="3483746"/>
+                  </a:lnTo>
+                  <a:lnTo>
+                    <a:pt x="1194676" y="3483746"/>
+                  </a:lnTo>
+                  <a:lnTo>
+                    <a:pt x="1123054" y="3483746"/>
+                  </a:lnTo>
+                  <a:lnTo>
+                    <a:pt x="1051431" y="3483746"/>
+                  </a:lnTo>
+                  <a:lnTo>
+                    <a:pt x="979809" y="3483746"/>
+                  </a:lnTo>
+                  <a:lnTo>
+                    <a:pt x="908186" y="3483745"/>
+                  </a:lnTo>
+                  <a:lnTo>
+                    <a:pt x="836564" y="3483743"/>
+                  </a:lnTo>
+                  <a:lnTo>
+                    <a:pt x="764941" y="3483734"/>
+                  </a:lnTo>
+                  <a:lnTo>
+                    <a:pt x="693318" y="3483705"/>
+                  </a:lnTo>
+                  <a:lnTo>
+                    <a:pt x="621696" y="3483605"/>
+                  </a:lnTo>
+                  <a:lnTo>
+                    <a:pt x="550073" y="3483269"/>
+                  </a:lnTo>
+                  <a:lnTo>
+                    <a:pt x="478451" y="3482137"/>
+                  </a:lnTo>
+                  <a:lnTo>
+                    <a:pt x="406828" y="3478312"/>
+                  </a:lnTo>
+                  <a:lnTo>
+                    <a:pt x="335206" y="3465403"/>
+                  </a:lnTo>
+                  <a:lnTo>
+                    <a:pt x="263583" y="3421826"/>
+                  </a:lnTo>
+                  <a:lnTo>
+                    <a:pt x="191961" y="3274730"/>
+                  </a:lnTo>
+                  <a:lnTo>
+                    <a:pt x="120338" y="2778197"/>
+                  </a:lnTo>
+                  <a:lnTo>
+                    <a:pt x="48716" y="1705454"/>
                   </a:lnTo>
                   <a:lnTo>
                     <a:pt x="0" y="0"/>
@@ -3765,186 +3765,186 @@
           </p:nvSpPr>
           <p:spPr>
             <a:xfrm>
-              <a:off x="4236309" y="2073503"/>
-              <a:ext cx="4026369" cy="3483746"/>
+              <a:off x="4237866" y="2073503"/>
+              <a:ext cx="4024813" cy="3483746"/>
             </a:xfrm>
             <a:custGeom>
               <a:avLst/>
               <a:pathLst>
-                <a:path w="4026369" h="3483746">
+                <a:path w="4024813" h="3483746">
                   <a:moveTo>
                     <a:pt x="0" y="0"/>
                   </a:moveTo>
                   <a:lnTo>
-                    <a:pt x="15508" y="1158189"/>
-                  </a:lnTo>
-                  <a:lnTo>
-                    <a:pt x="87130" y="2750926"/>
-                  </a:lnTo>
-                  <a:lnTo>
-                    <a:pt x="158753" y="3187982"/>
-                  </a:lnTo>
-                  <a:lnTo>
-                    <a:pt x="230375" y="3364376"/>
-                  </a:lnTo>
-                  <a:lnTo>
-                    <a:pt x="301998" y="3435569"/>
-                  </a:lnTo>
-                  <a:lnTo>
-                    <a:pt x="373620" y="3464302"/>
-                  </a:lnTo>
-                  <a:lnTo>
-                    <a:pt x="445243" y="3475899"/>
-                  </a:lnTo>
-                  <a:lnTo>
-                    <a:pt x="516865" y="3480579"/>
-                  </a:lnTo>
-                  <a:lnTo>
-                    <a:pt x="588488" y="3482468"/>
-                  </a:lnTo>
-                  <a:lnTo>
-                    <a:pt x="660110" y="3483230"/>
-                  </a:lnTo>
-                  <a:lnTo>
-                    <a:pt x="731733" y="3483538"/>
-                  </a:lnTo>
-                  <a:lnTo>
-                    <a:pt x="803355" y="3483662"/>
-                  </a:lnTo>
-                  <a:lnTo>
-                    <a:pt x="874978" y="3483712"/>
-                  </a:lnTo>
-                  <a:lnTo>
-                    <a:pt x="946601" y="3483733"/>
-                  </a:lnTo>
-                  <a:lnTo>
-                    <a:pt x="1018223" y="3483741"/>
-                  </a:lnTo>
-                  <a:lnTo>
-                    <a:pt x="1089846" y="3483744"/>
-                  </a:lnTo>
-                  <a:lnTo>
-                    <a:pt x="1161468" y="3483746"/>
-                  </a:lnTo>
-                  <a:lnTo>
-                    <a:pt x="1233091" y="3483746"/>
-                  </a:lnTo>
-                  <a:lnTo>
-                    <a:pt x="1304713" y="3483746"/>
-                  </a:lnTo>
-                  <a:lnTo>
-                    <a:pt x="1376336" y="3483746"/>
-                  </a:lnTo>
-                  <a:lnTo>
-                    <a:pt x="1447958" y="3483746"/>
-                  </a:lnTo>
-                  <a:lnTo>
-                    <a:pt x="1519581" y="3483746"/>
-                  </a:lnTo>
-                  <a:lnTo>
-                    <a:pt x="1591203" y="3483746"/>
-                  </a:lnTo>
-                  <a:lnTo>
-                    <a:pt x="1662826" y="3483746"/>
-                  </a:lnTo>
-                  <a:lnTo>
-                    <a:pt x="1734448" y="3483746"/>
-                  </a:lnTo>
-                  <a:lnTo>
-                    <a:pt x="1806071" y="3483746"/>
-                  </a:lnTo>
-                  <a:lnTo>
-                    <a:pt x="1877693" y="3483746"/>
-                  </a:lnTo>
-                  <a:lnTo>
-                    <a:pt x="1949316" y="3483746"/>
-                  </a:lnTo>
-                  <a:lnTo>
-                    <a:pt x="2020938" y="3483746"/>
-                  </a:lnTo>
-                  <a:lnTo>
-                    <a:pt x="2092561" y="3483746"/>
-                  </a:lnTo>
-                  <a:lnTo>
-                    <a:pt x="2164183" y="3483746"/>
-                  </a:lnTo>
-                  <a:lnTo>
-                    <a:pt x="2235806" y="3483746"/>
-                  </a:lnTo>
-                  <a:lnTo>
-                    <a:pt x="2307429" y="3483746"/>
-                  </a:lnTo>
-                  <a:lnTo>
-                    <a:pt x="2379051" y="3483746"/>
-                  </a:lnTo>
-                  <a:lnTo>
-                    <a:pt x="2450674" y="3483746"/>
-                  </a:lnTo>
-                  <a:lnTo>
-                    <a:pt x="2522296" y="3483746"/>
-                  </a:lnTo>
-                  <a:lnTo>
-                    <a:pt x="2593919" y="3483746"/>
-                  </a:lnTo>
-                  <a:lnTo>
-                    <a:pt x="2665541" y="3483746"/>
-                  </a:lnTo>
-                  <a:lnTo>
-                    <a:pt x="2737164" y="3483746"/>
-                  </a:lnTo>
-                  <a:lnTo>
-                    <a:pt x="2808786" y="3483746"/>
-                  </a:lnTo>
-                  <a:lnTo>
-                    <a:pt x="2880409" y="3483746"/>
-                  </a:lnTo>
-                  <a:lnTo>
-                    <a:pt x="2952031" y="3483746"/>
-                  </a:lnTo>
-                  <a:lnTo>
-                    <a:pt x="3023654" y="3483746"/>
-                  </a:lnTo>
-                  <a:lnTo>
-                    <a:pt x="3095276" y="3483746"/>
-                  </a:lnTo>
-                  <a:lnTo>
-                    <a:pt x="3166899" y="3483746"/>
-                  </a:lnTo>
-                  <a:lnTo>
-                    <a:pt x="3238521" y="3483746"/>
-                  </a:lnTo>
-                  <a:lnTo>
-                    <a:pt x="3310144" y="3483746"/>
-                  </a:lnTo>
-                  <a:lnTo>
-                    <a:pt x="3381766" y="3483746"/>
-                  </a:lnTo>
-                  <a:lnTo>
-                    <a:pt x="3453389" y="3483746"/>
-                  </a:lnTo>
-                  <a:lnTo>
-                    <a:pt x="3525011" y="3483746"/>
-                  </a:lnTo>
-                  <a:lnTo>
-                    <a:pt x="3596634" y="3483746"/>
-                  </a:lnTo>
-                  <a:lnTo>
-                    <a:pt x="3668256" y="3483746"/>
-                  </a:lnTo>
-                  <a:lnTo>
-                    <a:pt x="3739879" y="3483746"/>
-                  </a:lnTo>
-                  <a:lnTo>
-                    <a:pt x="3811502" y="3483746"/>
-                  </a:lnTo>
-                  <a:lnTo>
-                    <a:pt x="3883124" y="3483746"/>
-                  </a:lnTo>
-                  <a:lnTo>
-                    <a:pt x="3954747" y="3483746"/>
-                  </a:lnTo>
-                  <a:lnTo>
-                    <a:pt x="4026369" y="3483746"/>
+                    <a:pt x="13951" y="1102115"/>
+                  </a:lnTo>
+                  <a:lnTo>
+                    <a:pt x="85574" y="2745859"/>
+                  </a:lnTo>
+                  <a:lnTo>
+                    <a:pt x="157196" y="3177567"/>
+                  </a:lnTo>
+                  <a:lnTo>
+                    <a:pt x="228819" y="3356700"/>
+                  </a:lnTo>
+                  <a:lnTo>
+                    <a:pt x="300442" y="3431029"/>
+                  </a:lnTo>
+                  <a:lnTo>
+                    <a:pt x="372064" y="3461872"/>
+                  </a:lnTo>
+                  <a:lnTo>
+                    <a:pt x="443687" y="3474670"/>
+                  </a:lnTo>
+                  <a:lnTo>
+                    <a:pt x="515309" y="3479980"/>
+                  </a:lnTo>
+                  <a:lnTo>
+                    <a:pt x="586932" y="3482184"/>
+                  </a:lnTo>
+                  <a:lnTo>
+                    <a:pt x="658554" y="3483098"/>
+                  </a:lnTo>
+                  <a:lnTo>
+                    <a:pt x="730177" y="3483477"/>
+                  </a:lnTo>
+                  <a:lnTo>
+                    <a:pt x="801799" y="3483635"/>
+                  </a:lnTo>
+                  <a:lnTo>
+                    <a:pt x="873422" y="3483700"/>
+                  </a:lnTo>
+                  <a:lnTo>
+                    <a:pt x="945044" y="3483727"/>
+                  </a:lnTo>
+                  <a:lnTo>
+                    <a:pt x="1016667" y="3483738"/>
+                  </a:lnTo>
+                  <a:lnTo>
+                    <a:pt x="1088289" y="3483743"/>
+                  </a:lnTo>
+                  <a:lnTo>
+                    <a:pt x="1159912" y="3483745"/>
+                  </a:lnTo>
+                  <a:lnTo>
+                    <a:pt x="1231534" y="3483746"/>
+                  </a:lnTo>
+                  <a:lnTo>
+                    <a:pt x="1303157" y="3483746"/>
+                  </a:lnTo>
+                  <a:lnTo>
+                    <a:pt x="1374779" y="3483746"/>
+                  </a:lnTo>
+                  <a:lnTo>
+                    <a:pt x="1446402" y="3483746"/>
+                  </a:lnTo>
+                  <a:lnTo>
+                    <a:pt x="1518024" y="3483746"/>
+                  </a:lnTo>
+                  <a:lnTo>
+                    <a:pt x="1589647" y="3483746"/>
+                  </a:lnTo>
+                  <a:lnTo>
+                    <a:pt x="1661270" y="3483746"/>
+                  </a:lnTo>
+                  <a:lnTo>
+                    <a:pt x="1732892" y="3483746"/>
+                  </a:lnTo>
+                  <a:lnTo>
+                    <a:pt x="1804515" y="3483746"/>
+                  </a:lnTo>
+                  <a:lnTo>
+                    <a:pt x="1876137" y="3483746"/>
+                  </a:lnTo>
+                  <a:lnTo>
+                    <a:pt x="1947760" y="3483746"/>
+                  </a:lnTo>
+                  <a:lnTo>
+                    <a:pt x="2019382" y="3483746"/>
+                  </a:lnTo>
+                  <a:lnTo>
+                    <a:pt x="2091005" y="3483746"/>
+                  </a:lnTo>
+                  <a:lnTo>
+                    <a:pt x="2162627" y="3483746"/>
+                  </a:lnTo>
+                  <a:lnTo>
+                    <a:pt x="2234250" y="3483746"/>
+                  </a:lnTo>
+                  <a:lnTo>
+                    <a:pt x="2305872" y="3483746"/>
+                  </a:lnTo>
+                  <a:lnTo>
+                    <a:pt x="2377495" y="3483746"/>
+                  </a:lnTo>
+                  <a:lnTo>
+                    <a:pt x="2449117" y="3483746"/>
+                  </a:lnTo>
+                  <a:lnTo>
+                    <a:pt x="2520740" y="3483746"/>
+                  </a:lnTo>
+                  <a:lnTo>
+                    <a:pt x="2592362" y="3483746"/>
+                  </a:lnTo>
+                  <a:lnTo>
+                    <a:pt x="2663985" y="3483746"/>
+                  </a:lnTo>
+                  <a:lnTo>
+                    <a:pt x="2735607" y="3483746"/>
+                  </a:lnTo>
+                  <a:lnTo>
+                    <a:pt x="2807230" y="3483746"/>
+                  </a:lnTo>
+                  <a:lnTo>
+                    <a:pt x="2878852" y="3483746"/>
+                  </a:lnTo>
+                  <a:lnTo>
+                    <a:pt x="2950475" y="3483746"/>
+                  </a:lnTo>
+                  <a:lnTo>
+                    <a:pt x="3022098" y="3483746"/>
+                  </a:lnTo>
+                  <a:lnTo>
+                    <a:pt x="3093720" y="3483746"/>
+                  </a:lnTo>
+                  <a:lnTo>
+                    <a:pt x="3165343" y="3483746"/>
+                  </a:lnTo>
+                  <a:lnTo>
+                    <a:pt x="3236965" y="3483746"/>
+                  </a:lnTo>
+                  <a:lnTo>
+                    <a:pt x="3308588" y="3483746"/>
+                  </a:lnTo>
+                  <a:lnTo>
+                    <a:pt x="3380210" y="3483746"/>
+                  </a:lnTo>
+                  <a:lnTo>
+                    <a:pt x="3451833" y="3483746"/>
+                  </a:lnTo>
+                  <a:lnTo>
+                    <a:pt x="3523455" y="3483746"/>
+                  </a:lnTo>
+                  <a:lnTo>
+                    <a:pt x="3595078" y="3483746"/>
+                  </a:lnTo>
+                  <a:lnTo>
+                    <a:pt x="3666700" y="3483746"/>
+                  </a:lnTo>
+                  <a:lnTo>
+                    <a:pt x="3738323" y="3483746"/>
+                  </a:lnTo>
+                  <a:lnTo>
+                    <a:pt x="3809945" y="3483746"/>
+                  </a:lnTo>
+                  <a:lnTo>
+                    <a:pt x="3881568" y="3483746"/>
+                  </a:lnTo>
+                  <a:lnTo>
+                    <a:pt x="3953190" y="3483746"/>
+                  </a:lnTo>
+                  <a:lnTo>
+                    <a:pt x="4024813" y="3483746"/>
                   </a:lnTo>
                 </a:path>
               </a:pathLst>
@@ -3964,183 +3964,183 @@
           </p:nvSpPr>
           <p:spPr>
             <a:xfrm>
-              <a:off x="4207291" y="2073503"/>
-              <a:ext cx="4055387" cy="3483746"/>
+              <a:off x="4203101" y="2073503"/>
+              <a:ext cx="4059577" cy="3483746"/>
             </a:xfrm>
             <a:custGeom>
               <a:avLst/>
               <a:pathLst>
-                <a:path w="4055387" h="3483746">
+                <a:path w="4059577" h="3483746">
                   <a:moveTo>
-                    <a:pt x="4055387" y="3483746"/>
+                    <a:pt x="4059577" y="3483746"/>
                   </a:moveTo>
                   <a:lnTo>
-                    <a:pt x="3983765" y="3483746"/>
-                  </a:lnTo>
-                  <a:lnTo>
-                    <a:pt x="3912142" y="3483746"/>
-                  </a:lnTo>
-                  <a:lnTo>
-                    <a:pt x="3840519" y="3483746"/>
-                  </a:lnTo>
-                  <a:lnTo>
-                    <a:pt x="3768897" y="3483746"/>
-                  </a:lnTo>
-                  <a:lnTo>
-                    <a:pt x="3697274" y="3483746"/>
-                  </a:lnTo>
-                  <a:lnTo>
-                    <a:pt x="3625652" y="3483746"/>
-                  </a:lnTo>
-                  <a:lnTo>
-                    <a:pt x="3554029" y="3483746"/>
-                  </a:lnTo>
-                  <a:lnTo>
-                    <a:pt x="3482407" y="3483746"/>
-                  </a:lnTo>
-                  <a:lnTo>
-                    <a:pt x="3410784" y="3483746"/>
-                  </a:lnTo>
-                  <a:lnTo>
-                    <a:pt x="3339162" y="3483746"/>
-                  </a:lnTo>
-                  <a:lnTo>
-                    <a:pt x="3267539" y="3483746"/>
-                  </a:lnTo>
-                  <a:lnTo>
-                    <a:pt x="3195917" y="3483746"/>
-                  </a:lnTo>
-                  <a:lnTo>
-                    <a:pt x="3124294" y="3483746"/>
-                  </a:lnTo>
-                  <a:lnTo>
-                    <a:pt x="3052672" y="3483746"/>
-                  </a:lnTo>
-                  <a:lnTo>
-                    <a:pt x="2981049" y="3483746"/>
-                  </a:lnTo>
-                  <a:lnTo>
-                    <a:pt x="2909427" y="3483746"/>
-                  </a:lnTo>
-                  <a:lnTo>
-                    <a:pt x="2837804" y="3483746"/>
-                  </a:lnTo>
-                  <a:lnTo>
-                    <a:pt x="2766182" y="3483746"/>
-                  </a:lnTo>
-                  <a:lnTo>
-                    <a:pt x="2694559" y="3483746"/>
-                  </a:lnTo>
-                  <a:lnTo>
-                    <a:pt x="2622937" y="3483746"/>
-                  </a:lnTo>
-                  <a:lnTo>
-                    <a:pt x="2551314" y="3483746"/>
-                  </a:lnTo>
-                  <a:lnTo>
-                    <a:pt x="2479691" y="3483746"/>
-                  </a:lnTo>
-                  <a:lnTo>
-                    <a:pt x="2408069" y="3483746"/>
-                  </a:lnTo>
-                  <a:lnTo>
-                    <a:pt x="2336446" y="3483746"/>
-                  </a:lnTo>
-                  <a:lnTo>
-                    <a:pt x="2264824" y="3483746"/>
-                  </a:lnTo>
-                  <a:lnTo>
-                    <a:pt x="2193201" y="3483746"/>
-                  </a:lnTo>
-                  <a:lnTo>
-                    <a:pt x="2121579" y="3483746"/>
-                  </a:lnTo>
-                  <a:lnTo>
-                    <a:pt x="2049956" y="3483746"/>
-                  </a:lnTo>
-                  <a:lnTo>
-                    <a:pt x="1978334" y="3483746"/>
-                  </a:lnTo>
-                  <a:lnTo>
-                    <a:pt x="1906711" y="3483746"/>
-                  </a:lnTo>
-                  <a:lnTo>
-                    <a:pt x="1835089" y="3483746"/>
-                  </a:lnTo>
-                  <a:lnTo>
-                    <a:pt x="1763466" y="3483746"/>
-                  </a:lnTo>
-                  <a:lnTo>
-                    <a:pt x="1691844" y="3483746"/>
-                  </a:lnTo>
-                  <a:lnTo>
-                    <a:pt x="1620221" y="3483746"/>
-                  </a:lnTo>
-                  <a:lnTo>
-                    <a:pt x="1548599" y="3483746"/>
-                  </a:lnTo>
-                  <a:lnTo>
-                    <a:pt x="1476976" y="3483746"/>
-                  </a:lnTo>
-                  <a:lnTo>
-                    <a:pt x="1405354" y="3483746"/>
-                  </a:lnTo>
-                  <a:lnTo>
-                    <a:pt x="1333731" y="3483746"/>
-                  </a:lnTo>
-                  <a:lnTo>
-                    <a:pt x="1262109" y="3483746"/>
-                  </a:lnTo>
-                  <a:lnTo>
-                    <a:pt x="1190486" y="3483746"/>
-                  </a:lnTo>
-                  <a:lnTo>
-                    <a:pt x="1118863" y="3483746"/>
-                  </a:lnTo>
-                  <a:lnTo>
-                    <a:pt x="1047241" y="3483746"/>
-                  </a:lnTo>
-                  <a:lnTo>
-                    <a:pt x="975618" y="3483746"/>
-                  </a:lnTo>
-                  <a:lnTo>
-                    <a:pt x="903996" y="3483745"/>
-                  </a:lnTo>
-                  <a:lnTo>
-                    <a:pt x="832373" y="3483742"/>
-                  </a:lnTo>
-                  <a:lnTo>
-                    <a:pt x="760751" y="3483731"/>
-                  </a:lnTo>
-                  <a:lnTo>
-                    <a:pt x="689128" y="3483696"/>
-                  </a:lnTo>
-                  <a:lnTo>
-                    <a:pt x="617506" y="3483581"/>
-                  </a:lnTo>
-                  <a:lnTo>
-                    <a:pt x="545883" y="3483201"/>
-                  </a:lnTo>
-                  <a:lnTo>
-                    <a:pt x="474261" y="3481946"/>
-                  </a:lnTo>
-                  <a:lnTo>
-                    <a:pt x="402638" y="3477805"/>
-                  </a:lnTo>
-                  <a:lnTo>
-                    <a:pt x="331016" y="3464138"/>
-                  </a:lnTo>
-                  <a:lnTo>
-                    <a:pt x="259393" y="3419039"/>
-                  </a:lnTo>
-                  <a:lnTo>
-                    <a:pt x="187771" y="3270206"/>
-                  </a:lnTo>
-                  <a:lnTo>
-                    <a:pt x="116148" y="2779048"/>
-                  </a:lnTo>
-                  <a:lnTo>
-                    <a:pt x="44526" y="1668028"/>
+                    <a:pt x="3987955" y="3483746"/>
+                  </a:lnTo>
+                  <a:lnTo>
+                    <a:pt x="3916332" y="3483746"/>
+                  </a:lnTo>
+                  <a:lnTo>
+                    <a:pt x="3844710" y="3483746"/>
+                  </a:lnTo>
+                  <a:lnTo>
+                    <a:pt x="3773087" y="3483746"/>
+                  </a:lnTo>
+                  <a:lnTo>
+                    <a:pt x="3701465" y="3483746"/>
+                  </a:lnTo>
+                  <a:lnTo>
+                    <a:pt x="3629842" y="3483746"/>
+                  </a:lnTo>
+                  <a:lnTo>
+                    <a:pt x="3558220" y="3483746"/>
+                  </a:lnTo>
+                  <a:lnTo>
+                    <a:pt x="3486597" y="3483746"/>
+                  </a:lnTo>
+                  <a:lnTo>
+                    <a:pt x="3414974" y="3483746"/>
+                  </a:lnTo>
+                  <a:lnTo>
+                    <a:pt x="3343352" y="3483746"/>
+                  </a:lnTo>
+                  <a:lnTo>
+                    <a:pt x="3271729" y="3483746"/>
+                  </a:lnTo>
+                  <a:lnTo>
+                    <a:pt x="3200107" y="3483746"/>
+                  </a:lnTo>
+                  <a:lnTo>
+                    <a:pt x="3128484" y="3483746"/>
+                  </a:lnTo>
+                  <a:lnTo>
+                    <a:pt x="3056862" y="3483746"/>
+                  </a:lnTo>
+                  <a:lnTo>
+                    <a:pt x="2985239" y="3483746"/>
+                  </a:lnTo>
+                  <a:lnTo>
+                    <a:pt x="2913617" y="3483746"/>
+                  </a:lnTo>
+                  <a:lnTo>
+                    <a:pt x="2841994" y="3483746"/>
+                  </a:lnTo>
+                  <a:lnTo>
+                    <a:pt x="2770372" y="3483746"/>
+                  </a:lnTo>
+                  <a:lnTo>
+                    <a:pt x="2698749" y="3483746"/>
+                  </a:lnTo>
+                  <a:lnTo>
+                    <a:pt x="2627127" y="3483746"/>
+                  </a:lnTo>
+                  <a:lnTo>
+                    <a:pt x="2555504" y="3483746"/>
+                  </a:lnTo>
+                  <a:lnTo>
+                    <a:pt x="2483882" y="3483746"/>
+                  </a:lnTo>
+                  <a:lnTo>
+                    <a:pt x="2412259" y="3483746"/>
+                  </a:lnTo>
+                  <a:lnTo>
+                    <a:pt x="2340637" y="3483746"/>
+                  </a:lnTo>
+                  <a:lnTo>
+                    <a:pt x="2269014" y="3483746"/>
+                  </a:lnTo>
+                  <a:lnTo>
+                    <a:pt x="2197392" y="3483746"/>
+                  </a:lnTo>
+                  <a:lnTo>
+                    <a:pt x="2125769" y="3483746"/>
+                  </a:lnTo>
+                  <a:lnTo>
+                    <a:pt x="2054146" y="3483746"/>
+                  </a:lnTo>
+                  <a:lnTo>
+                    <a:pt x="1982524" y="3483746"/>
+                  </a:lnTo>
+                  <a:lnTo>
+                    <a:pt x="1910901" y="3483746"/>
+                  </a:lnTo>
+                  <a:lnTo>
+                    <a:pt x="1839279" y="3483746"/>
+                  </a:lnTo>
+                  <a:lnTo>
+                    <a:pt x="1767656" y="3483746"/>
+                  </a:lnTo>
+                  <a:lnTo>
+                    <a:pt x="1696034" y="3483746"/>
+                  </a:lnTo>
+                  <a:lnTo>
+                    <a:pt x="1624411" y="3483746"/>
+                  </a:lnTo>
+                  <a:lnTo>
+                    <a:pt x="1552789" y="3483746"/>
+                  </a:lnTo>
+                  <a:lnTo>
+                    <a:pt x="1481166" y="3483746"/>
+                  </a:lnTo>
+                  <a:lnTo>
+                    <a:pt x="1409544" y="3483746"/>
+                  </a:lnTo>
+                  <a:lnTo>
+                    <a:pt x="1337921" y="3483746"/>
+                  </a:lnTo>
+                  <a:lnTo>
+                    <a:pt x="1266299" y="3483746"/>
+                  </a:lnTo>
+                  <a:lnTo>
+                    <a:pt x="1194676" y="3483746"/>
+                  </a:lnTo>
+                  <a:lnTo>
+                    <a:pt x="1123054" y="3483746"/>
+                  </a:lnTo>
+                  <a:lnTo>
+                    <a:pt x="1051431" y="3483746"/>
+                  </a:lnTo>
+                  <a:lnTo>
+                    <a:pt x="979809" y="3483746"/>
+                  </a:lnTo>
+                  <a:lnTo>
+                    <a:pt x="908186" y="3483745"/>
+                  </a:lnTo>
+                  <a:lnTo>
+                    <a:pt x="836564" y="3483743"/>
+                  </a:lnTo>
+                  <a:lnTo>
+                    <a:pt x="764941" y="3483734"/>
+                  </a:lnTo>
+                  <a:lnTo>
+                    <a:pt x="693318" y="3483705"/>
+                  </a:lnTo>
+                  <a:lnTo>
+                    <a:pt x="621696" y="3483605"/>
+                  </a:lnTo>
+                  <a:lnTo>
+                    <a:pt x="550073" y="3483269"/>
+                  </a:lnTo>
+                  <a:lnTo>
+                    <a:pt x="478451" y="3482137"/>
+                  </a:lnTo>
+                  <a:lnTo>
+                    <a:pt x="406828" y="3478312"/>
+                  </a:lnTo>
+                  <a:lnTo>
+                    <a:pt x="335206" y="3465403"/>
+                  </a:lnTo>
+                  <a:lnTo>
+                    <a:pt x="263583" y="3421826"/>
+                  </a:lnTo>
+                  <a:lnTo>
+                    <a:pt x="191961" y="3274730"/>
+                  </a:lnTo>
+                  <a:lnTo>
+                    <a:pt x="120338" y="2778197"/>
+                  </a:lnTo>
+                  <a:lnTo>
+                    <a:pt x="48716" y="1705454"/>
                   </a:lnTo>
                   <a:lnTo>
                     <a:pt x="0" y="0"/>
@@ -4163,186 +4163,186 @@
           </p:nvSpPr>
           <p:spPr>
             <a:xfrm>
-              <a:off x="4225034" y="2073503"/>
-              <a:ext cx="4037644" cy="3483746"/>
+              <a:off x="4225027" y="2073503"/>
+              <a:ext cx="4037651" cy="3483746"/>
             </a:xfrm>
             <a:custGeom>
               <a:avLst/>
               <a:pathLst>
-                <a:path w="4037644" h="3483746">
+                <a:path w="4037651" h="3483746">
                   <a:moveTo>
                     <a:pt x="0" y="0"/>
                   </a:moveTo>
                   <a:lnTo>
-                    <a:pt x="26783" y="1428860"/>
-                  </a:lnTo>
-                  <a:lnTo>
-                    <a:pt x="98405" y="2765125"/>
-                  </a:lnTo>
-                  <a:lnTo>
-                    <a:pt x="170028" y="3232435"/>
-                  </a:lnTo>
-                  <a:lnTo>
-                    <a:pt x="241650" y="3395859"/>
-                  </a:lnTo>
-                  <a:lnTo>
-                    <a:pt x="313273" y="3453011"/>
-                  </a:lnTo>
-                  <a:lnTo>
-                    <a:pt x="384895" y="3472998"/>
-                  </a:lnTo>
-                  <a:lnTo>
-                    <a:pt x="456518" y="3479987"/>
-                  </a:lnTo>
-                  <a:lnTo>
-                    <a:pt x="528140" y="3482432"/>
-                  </a:lnTo>
-                  <a:lnTo>
-                    <a:pt x="599763" y="3483287"/>
-                  </a:lnTo>
-                  <a:lnTo>
-                    <a:pt x="671385" y="3483586"/>
-                  </a:lnTo>
-                  <a:lnTo>
-                    <a:pt x="743008" y="3483690"/>
-                  </a:lnTo>
-                  <a:lnTo>
-                    <a:pt x="814630" y="3483727"/>
-                  </a:lnTo>
-                  <a:lnTo>
-                    <a:pt x="886253" y="3483740"/>
-                  </a:lnTo>
-                  <a:lnTo>
-                    <a:pt x="957875" y="3483744"/>
-                  </a:lnTo>
-                  <a:lnTo>
-                    <a:pt x="1029498" y="3483746"/>
-                  </a:lnTo>
-                  <a:lnTo>
-                    <a:pt x="1101120" y="3483746"/>
-                  </a:lnTo>
-                  <a:lnTo>
-                    <a:pt x="1172743" y="3483746"/>
-                  </a:lnTo>
-                  <a:lnTo>
-                    <a:pt x="1244365" y="3483746"/>
-                  </a:lnTo>
-                  <a:lnTo>
-                    <a:pt x="1315988" y="3483746"/>
-                  </a:lnTo>
-                  <a:lnTo>
-                    <a:pt x="1387611" y="3483746"/>
-                  </a:lnTo>
-                  <a:lnTo>
-                    <a:pt x="1459233" y="3483746"/>
-                  </a:lnTo>
-                  <a:lnTo>
-                    <a:pt x="1530856" y="3483746"/>
-                  </a:lnTo>
-                  <a:lnTo>
-                    <a:pt x="1602478" y="3483746"/>
-                  </a:lnTo>
-                  <a:lnTo>
-                    <a:pt x="1674101" y="3483746"/>
-                  </a:lnTo>
-                  <a:lnTo>
-                    <a:pt x="1745723" y="3483746"/>
-                  </a:lnTo>
-                  <a:lnTo>
-                    <a:pt x="1817346" y="3483746"/>
-                  </a:lnTo>
-                  <a:lnTo>
-                    <a:pt x="1888968" y="3483746"/>
-                  </a:lnTo>
-                  <a:lnTo>
-                    <a:pt x="1960591" y="3483746"/>
-                  </a:lnTo>
-                  <a:lnTo>
-                    <a:pt x="2032213" y="3483746"/>
-                  </a:lnTo>
-                  <a:lnTo>
-                    <a:pt x="2103836" y="3483746"/>
-                  </a:lnTo>
-                  <a:lnTo>
-                    <a:pt x="2175458" y="3483746"/>
-                  </a:lnTo>
-                  <a:lnTo>
-                    <a:pt x="2247081" y="3483746"/>
-                  </a:lnTo>
-                  <a:lnTo>
-                    <a:pt x="2318703" y="3483746"/>
-                  </a:lnTo>
-                  <a:lnTo>
-                    <a:pt x="2390326" y="3483746"/>
-                  </a:lnTo>
-                  <a:lnTo>
-                    <a:pt x="2461948" y="3483746"/>
-                  </a:lnTo>
-                  <a:lnTo>
-                    <a:pt x="2533571" y="3483746"/>
-                  </a:lnTo>
-                  <a:lnTo>
-                    <a:pt x="2605193" y="3483746"/>
-                  </a:lnTo>
-                  <a:lnTo>
-                    <a:pt x="2676816" y="3483746"/>
-                  </a:lnTo>
-                  <a:lnTo>
-                    <a:pt x="2748439" y="3483746"/>
-                  </a:lnTo>
-                  <a:lnTo>
-                    <a:pt x="2820061" y="3483746"/>
-                  </a:lnTo>
-                  <a:lnTo>
-                    <a:pt x="2891684" y="3483746"/>
-                  </a:lnTo>
-                  <a:lnTo>
-                    <a:pt x="2963306" y="3483746"/>
-                  </a:lnTo>
-                  <a:lnTo>
-                    <a:pt x="3034929" y="3483746"/>
-                  </a:lnTo>
-                  <a:lnTo>
-                    <a:pt x="3106551" y="3483746"/>
-                  </a:lnTo>
-                  <a:lnTo>
-                    <a:pt x="3178174" y="3483746"/>
-                  </a:lnTo>
-                  <a:lnTo>
-                    <a:pt x="3249796" y="3483746"/>
-                  </a:lnTo>
-                  <a:lnTo>
-                    <a:pt x="3321419" y="3483746"/>
-                  </a:lnTo>
-                  <a:lnTo>
-                    <a:pt x="3393041" y="3483746"/>
-                  </a:lnTo>
-                  <a:lnTo>
-                    <a:pt x="3464664" y="3483746"/>
-                  </a:lnTo>
-                  <a:lnTo>
-                    <a:pt x="3536286" y="3483746"/>
-                  </a:lnTo>
-                  <a:lnTo>
-                    <a:pt x="3607909" y="3483746"/>
-                  </a:lnTo>
-                  <a:lnTo>
-                    <a:pt x="3679531" y="3483746"/>
-                  </a:lnTo>
-                  <a:lnTo>
-                    <a:pt x="3751154" y="3483746"/>
-                  </a:lnTo>
-                  <a:lnTo>
-                    <a:pt x="3822776" y="3483746"/>
-                  </a:lnTo>
-                  <a:lnTo>
-                    <a:pt x="3894399" y="3483746"/>
-                  </a:lnTo>
-                  <a:lnTo>
-                    <a:pt x="3966021" y="3483746"/>
-                  </a:lnTo>
-                  <a:lnTo>
-                    <a:pt x="4037644" y="3483746"/>
+                    <a:pt x="26790" y="1425777"/>
+                  </a:lnTo>
+                  <a:lnTo>
+                    <a:pt x="98412" y="2762209"/>
+                  </a:lnTo>
+                  <a:lnTo>
+                    <a:pt x="170035" y="3230771"/>
+                  </a:lnTo>
+                  <a:lnTo>
+                    <a:pt x="241657" y="3395051"/>
+                  </a:lnTo>
+                  <a:lnTo>
+                    <a:pt x="313280" y="3452649"/>
+                  </a:lnTo>
+                  <a:lnTo>
+                    <a:pt x="384902" y="3472844"/>
+                  </a:lnTo>
+                  <a:lnTo>
+                    <a:pt x="456525" y="3479924"/>
+                  </a:lnTo>
+                  <a:lnTo>
+                    <a:pt x="528147" y="3482406"/>
+                  </a:lnTo>
+                  <a:lnTo>
+                    <a:pt x="599770" y="3483277"/>
+                  </a:lnTo>
+                  <a:lnTo>
+                    <a:pt x="671392" y="3483582"/>
+                  </a:lnTo>
+                  <a:lnTo>
+                    <a:pt x="743015" y="3483689"/>
+                  </a:lnTo>
+                  <a:lnTo>
+                    <a:pt x="814637" y="3483726"/>
+                  </a:lnTo>
+                  <a:lnTo>
+                    <a:pt x="886260" y="3483739"/>
+                  </a:lnTo>
+                  <a:lnTo>
+                    <a:pt x="957882" y="3483744"/>
+                  </a:lnTo>
+                  <a:lnTo>
+                    <a:pt x="1029505" y="3483746"/>
+                  </a:lnTo>
+                  <a:lnTo>
+                    <a:pt x="1101128" y="3483746"/>
+                  </a:lnTo>
+                  <a:lnTo>
+                    <a:pt x="1172750" y="3483746"/>
+                  </a:lnTo>
+                  <a:lnTo>
+                    <a:pt x="1244373" y="3483746"/>
+                  </a:lnTo>
+                  <a:lnTo>
+                    <a:pt x="1315995" y="3483746"/>
+                  </a:lnTo>
+                  <a:lnTo>
+                    <a:pt x="1387618" y="3483746"/>
+                  </a:lnTo>
+                  <a:lnTo>
+                    <a:pt x="1459240" y="3483746"/>
+                  </a:lnTo>
+                  <a:lnTo>
+                    <a:pt x="1530863" y="3483746"/>
+                  </a:lnTo>
+                  <a:lnTo>
+                    <a:pt x="1602485" y="3483746"/>
+                  </a:lnTo>
+                  <a:lnTo>
+                    <a:pt x="1674108" y="3483746"/>
+                  </a:lnTo>
+                  <a:lnTo>
+                    <a:pt x="1745730" y="3483746"/>
+                  </a:lnTo>
+                  <a:lnTo>
+                    <a:pt x="1817353" y="3483746"/>
+                  </a:lnTo>
+                  <a:lnTo>
+                    <a:pt x="1888975" y="3483746"/>
+                  </a:lnTo>
+                  <a:lnTo>
+                    <a:pt x="1960598" y="3483746"/>
+                  </a:lnTo>
+                  <a:lnTo>
+                    <a:pt x="2032220" y="3483746"/>
+                  </a:lnTo>
+                  <a:lnTo>
+                    <a:pt x="2103843" y="3483746"/>
+                  </a:lnTo>
+                  <a:lnTo>
+                    <a:pt x="2175465" y="3483746"/>
+                  </a:lnTo>
+                  <a:lnTo>
+                    <a:pt x="2247088" y="3483746"/>
+                  </a:lnTo>
+                  <a:lnTo>
+                    <a:pt x="2318710" y="3483746"/>
+                  </a:lnTo>
+                  <a:lnTo>
+                    <a:pt x="2390333" y="3483746"/>
+                  </a:lnTo>
+                  <a:lnTo>
+                    <a:pt x="2461956" y="3483746"/>
+                  </a:lnTo>
+                  <a:lnTo>
+                    <a:pt x="2533578" y="3483746"/>
+                  </a:lnTo>
+                  <a:lnTo>
+                    <a:pt x="2605201" y="3483746"/>
+                  </a:lnTo>
+                  <a:lnTo>
+                    <a:pt x="2676823" y="3483746"/>
+                  </a:lnTo>
+                  <a:lnTo>
+                    <a:pt x="2748446" y="3483746"/>
+                  </a:lnTo>
+                  <a:lnTo>
+                    <a:pt x="2820068" y="3483746"/>
+                  </a:lnTo>
+                  <a:lnTo>
+                    <a:pt x="2891691" y="3483746"/>
+                  </a:lnTo>
+                  <a:lnTo>
+                    <a:pt x="2963313" y="3483746"/>
+                  </a:lnTo>
+                  <a:lnTo>
+                    <a:pt x="3034936" y="3483746"/>
+                  </a:lnTo>
+                  <a:lnTo>
+                    <a:pt x="3106558" y="3483746"/>
+                  </a:lnTo>
+                  <a:lnTo>
+                    <a:pt x="3178181" y="3483746"/>
+                  </a:lnTo>
+                  <a:lnTo>
+                    <a:pt x="3249803" y="3483746"/>
+                  </a:lnTo>
+                  <a:lnTo>
+                    <a:pt x="3321426" y="3483746"/>
+                  </a:lnTo>
+                  <a:lnTo>
+                    <a:pt x="3393048" y="3483746"/>
+                  </a:lnTo>
+                  <a:lnTo>
+                    <a:pt x="3464671" y="3483746"/>
+                  </a:lnTo>
+                  <a:lnTo>
+                    <a:pt x="3536293" y="3483746"/>
+                  </a:lnTo>
+                  <a:lnTo>
+                    <a:pt x="3607916" y="3483746"/>
+                  </a:lnTo>
+                  <a:lnTo>
+                    <a:pt x="3679538" y="3483746"/>
+                  </a:lnTo>
+                  <a:lnTo>
+                    <a:pt x="3751161" y="3483746"/>
+                  </a:lnTo>
+                  <a:lnTo>
+                    <a:pt x="3822784" y="3483746"/>
+                  </a:lnTo>
+                  <a:lnTo>
+                    <a:pt x="3894406" y="3483746"/>
+                  </a:lnTo>
+                  <a:lnTo>
+                    <a:pt x="3966029" y="3483746"/>
+                  </a:lnTo>
+                  <a:lnTo>
+                    <a:pt x="4037651" y="3483746"/>
                   </a:lnTo>
                 </a:path>
               </a:pathLst>
@@ -4414,7 +4414,7 @@
           </p:nvSpPr>
           <p:spPr>
             <a:xfrm>
-              <a:off x="4313661" y="2073503"/>
+              <a:off x="4313914" y="2073503"/>
               <a:ext cx="0" cy="3649639"/>
             </a:xfrm>
             <a:custGeom>
@@ -4687,7 +4687,7 @@
           </p:nvSpPr>
           <p:spPr>
             <a:xfrm>
-              <a:off x="1343342" y="5785772"/>
+              <a:off x="1344940" y="5785772"/>
               <a:ext cx="161574" cy="80101"/>
             </a:xfrm>
             <a:prstGeom prst="rect">
@@ -4733,7 +4733,7 @@
           </p:nvSpPr>
           <p:spPr>
             <a:xfrm>
-              <a:off x="2280620" y="5785772"/>
+              <a:off x="2281218" y="5785772"/>
               <a:ext cx="161574" cy="80101"/>
             </a:xfrm>
             <a:prstGeom prst="rect">
@@ -4779,7 +4779,7 @@
           </p:nvSpPr>
           <p:spPr>
             <a:xfrm>
-              <a:off x="3217897" y="5785772"/>
+              <a:off x="3217496" y="5785772"/>
               <a:ext cx="161574" cy="80101"/>
             </a:xfrm>
             <a:prstGeom prst="rect">
@@ -4825,7 +4825,7 @@
           </p:nvSpPr>
           <p:spPr>
             <a:xfrm>
-              <a:off x="4204872" y="5785772"/>
+              <a:off x="4203472" y="5785772"/>
               <a:ext cx="62179" cy="80101"/>
             </a:xfrm>
             <a:prstGeom prst="rect">
@@ -4871,7 +4871,7 @@
           </p:nvSpPr>
           <p:spPr>
             <a:xfrm>
-              <a:off x="5111060" y="5785772"/>
+              <a:off x="5108660" y="5785772"/>
               <a:ext cx="124358" cy="80101"/>
             </a:xfrm>
             <a:prstGeom prst="rect">
@@ -4917,7 +4917,7 @@
           </p:nvSpPr>
           <p:spPr>
             <a:xfrm>
-              <a:off x="6048338" y="5785772"/>
+              <a:off x="6044938" y="5785772"/>
               <a:ext cx="124358" cy="80101"/>
             </a:xfrm>
             <a:prstGeom prst="rect">
@@ -4963,7 +4963,7 @@
           </p:nvSpPr>
           <p:spPr>
             <a:xfrm>
-              <a:off x="6985615" y="5785772"/>
+              <a:off x="6981216" y="5785772"/>
               <a:ext cx="124358" cy="80101"/>
             </a:xfrm>
             <a:prstGeom prst="rect">
@@ -5009,7 +5009,7 @@
           </p:nvSpPr>
           <p:spPr>
             <a:xfrm>
-              <a:off x="7922893" y="5785772"/>
+              <a:off x="7917494" y="5785772"/>
               <a:ext cx="124358" cy="80101"/>
             </a:xfrm>
             <a:prstGeom prst="rect">
@@ -5148,7 +5148,7 @@
           <p:spPr>
             <a:xfrm>
               <a:off x="817517" y="1896563"/>
-              <a:ext cx="10264962" cy="82021"/>
+              <a:ext cx="10137861" cy="82021"/>
             </a:xfrm>
             <a:prstGeom prst="rect">
               <a:avLst/>
@@ -5180,7 +5180,7 @@
                   <a:latin typeface="Helvetica"/>
                   <a:cs typeface="Helvetica"/>
                 </a:rPr>
-                <a:t>subHR per 10 % decline: 935702.20 (143446.65-6103583.48), p = &lt;0.001  |  per IQR decline (Δ = 25.8 %): 2670495689083826.00 (21010961525674.77-339420317185426560.00)  |  IQR: [-10.7, 15.1] %</a:t>
+                <a:t>subHR per 10 % decline: 891852.64 (98588.90-8067856.47), p = &lt;0.001  |  per IQR decline (Δ = 25.8 %): 2265240359266031.00 (7707164841377.64-665784888588224768.00)  |  IQR: [-10.6, 15.2] %</a:t>
               </a:r>
             </a:p>
           </p:txBody>
